--- a/builder/assets/reference-pages/slope-ranking.pptx
+++ b/builder/assets/reference-pages/slope-ranking.pptx
@@ -1097,7 +1097,7 @@
                   <a:srgbClr val="15375F"/>
                 </a:solidFill>
               </a:rPr>
-              <a:t>三年间前十榜单换位明显，上升者都完成了产品标准化</a:t>
+              <a:t>The top ten lists have changed significantly in the past three years, and those who have risen have completed product standardization.</a:t>
             </a:r>
           </a:p>
         </p:txBody>
@@ -1182,7 +1182,7 @@
                   <a:srgbClr val="15375F"/>
                 </a:solidFill>
               </a:rPr>
-              <a:t>2023 年</a:t>
+              <a:t>2023 year</a:t>
             </a:r>
           </a:p>
         </p:txBody>
@@ -1232,7 +1232,7 @@
                   <a:srgbClr val="15375F"/>
                 </a:solidFill>
               </a:rPr>
-              <a:t>2026 年</a:t>
+              <a:t>2026 year</a:t>
             </a:r>
           </a:p>
         </p:txBody>
@@ -1313,7 +1313,7 @@
                   <a:srgbClr val="2F6FB2"/>
                 </a:solidFill>
               </a:rPr>
-              <a:t>8. 业务 A  120</a:t>
+              <a:t>8. business A  120</a:t>
             </a:r>
           </a:p>
         </p:txBody>
@@ -1363,7 +1363,7 @@
                   <a:srgbClr val="2F6FB2"/>
                 </a:solidFill>
               </a:rPr>
-              <a:t>1. 业务 A  150  +7</a:t>
+              <a:t>1. business A  150  +7</a:t>
             </a:r>
           </a:p>
         </p:txBody>
@@ -1417,7 +1417,7 @@
                   <a:srgbClr val="15375F"/>
                 </a:solidFill>
               </a:rPr>
-              <a:t>产品标准化推动增长</a:t>
+              <a:t>Product standardization drives growth</a:t>
             </a:r>
           </a:p>
         </p:txBody>
@@ -1498,7 +1498,7 @@
                   <a:srgbClr val="2F6FB2"/>
                 </a:solidFill>
               </a:rPr>
-              <a:t>6. 业务 B  116</a:t>
+              <a:t>6. business B  116</a:t>
             </a:r>
           </a:p>
         </p:txBody>
@@ -1548,7 +1548,7 @@
                   <a:srgbClr val="2F6FB2"/>
                 </a:solidFill>
               </a:rPr>
-              <a:t>2. 业务 B  147  +4</a:t>
+              <a:t>2. business B  147  +4</a:t>
             </a:r>
           </a:p>
         </p:txBody>
@@ -1602,7 +1602,7 @@
                   <a:srgbClr val="15375F"/>
                 </a:solidFill>
               </a:rPr>
-              <a:t>产品标准化推动增长</a:t>
+              <a:t>Product standardization drives growth</a:t>
             </a:r>
           </a:p>
         </p:txBody>
@@ -1683,7 +1683,7 @@
                   <a:srgbClr val="2F6FB2"/>
                 </a:solidFill>
               </a:rPr>
-              <a:t>9. 业务 C  112</a:t>
+              <a:t>9. business C  112</a:t>
             </a:r>
           </a:p>
         </p:txBody>
@@ -1733,7 +1733,7 @@
                   <a:srgbClr val="2F6FB2"/>
                 </a:solidFill>
               </a:rPr>
-              <a:t>3. 业务 C  144  +6</a:t>
+              <a:t>3. business C  144  +6</a:t>
             </a:r>
           </a:p>
         </p:txBody>
@@ -1787,7 +1787,7 @@
                   <a:srgbClr val="15375F"/>
                 </a:solidFill>
               </a:rPr>
-              <a:t>产品标准化推动增长</a:t>
+              <a:t>Product standardization drives growth</a:t>
             </a:r>
           </a:p>
         </p:txBody>
@@ -1868,7 +1868,7 @@
                   <a:srgbClr val="E8872D"/>
                 </a:solidFill>
               </a:rPr>
-              <a:t>1. 业务 D  108</a:t>
+              <a:t>1. business D  108</a:t>
             </a:r>
           </a:p>
         </p:txBody>
@@ -1918,7 +1918,7 @@
                   <a:srgbClr val="E8872D"/>
                 </a:solidFill>
               </a:rPr>
-              <a:t>4. 业务 D  141  -3</a:t>
+              <a:t>4. business D  141  -3</a:t>
             </a:r>
           </a:p>
         </p:txBody>
@@ -1999,7 +1999,7 @@
                   <a:srgbClr val="E8872D"/>
                 </a:solidFill>
               </a:rPr>
-              <a:t>2. 业务 E  104</a:t>
+              <a:t>2. business E  104</a:t>
             </a:r>
           </a:p>
         </p:txBody>
@@ -2049,7 +2049,7 @@
                   <a:srgbClr val="E8872D"/>
                 </a:solidFill>
               </a:rPr>
-              <a:t>5. 业务 E  138  -3</a:t>
+              <a:t>5. business E  138  -3</a:t>
             </a:r>
           </a:p>
         </p:txBody>
@@ -2130,7 +2130,7 @@
                   <a:srgbClr val="E8872D"/>
                 </a:solidFill>
               </a:rPr>
-              <a:t>3. 业务 F  100</a:t>
+              <a:t>3. business F  100</a:t>
             </a:r>
           </a:p>
         </p:txBody>
@@ -2180,7 +2180,7 @@
                   <a:srgbClr val="E8872D"/>
                 </a:solidFill>
               </a:rPr>
-              <a:t>6. 业务 F  135  -3</a:t>
+              <a:t>6. business F  135  -3</a:t>
             </a:r>
           </a:p>
         </p:txBody>
@@ -2261,7 +2261,7 @@
                   <a:srgbClr val="E8872D"/>
                 </a:solidFill>
               </a:rPr>
-              <a:t>4. 业务 G  96</a:t>
+              <a:t>4. business G  96</a:t>
             </a:r>
           </a:p>
         </p:txBody>
@@ -2311,7 +2311,7 @@
                   <a:srgbClr val="E8872D"/>
                 </a:solidFill>
               </a:rPr>
-              <a:t>7. 业务 G  132  -3</a:t>
+              <a:t>7. business G  132  -3</a:t>
             </a:r>
           </a:p>
         </p:txBody>
@@ -2392,7 +2392,7 @@
                   <a:srgbClr val="E8872D"/>
                 </a:solidFill>
               </a:rPr>
-              <a:t>5. 业务 H  92</a:t>
+              <a:t>5. business H  92</a:t>
             </a:r>
           </a:p>
         </p:txBody>
@@ -2442,7 +2442,7 @@
                   <a:srgbClr val="E8872D"/>
                 </a:solidFill>
               </a:rPr>
-              <a:t>8. 业务 H  129  -3</a:t>
+              <a:t>8. business H  129  -3</a:t>
             </a:r>
           </a:p>
         </p:txBody>
@@ -2523,7 +2523,7 @@
                   <a:srgbClr val="E8872D"/>
                 </a:solidFill>
               </a:rPr>
-              <a:t>7. 业务 I  88</a:t>
+              <a:t>7. business I  88</a:t>
             </a:r>
           </a:p>
         </p:txBody>
@@ -2573,7 +2573,7 @@
                   <a:srgbClr val="E8872D"/>
                 </a:solidFill>
               </a:rPr>
-              <a:t>9. 业务 I  126  -2</a:t>
+              <a:t>9. business I  126  -2</a:t>
             </a:r>
           </a:p>
         </p:txBody>
@@ -2654,7 +2654,7 @@
                   <a:srgbClr val="697386"/>
                 </a:solidFill>
               </a:rPr>
-              <a:t>10. 业务 J  84</a:t>
+              <a:t>10. business J  84</a:t>
             </a:r>
           </a:p>
         </p:txBody>
@@ -2704,14 +2704,14 @@
                   <a:srgbClr val="697386"/>
                 </a:solidFill>
               </a:rPr>
-              <a:t>10. 业务 J  123  0</a:t>
+              <a:t>10. business J  123  0</a:t>
             </a:r>
           </a:p>
         </p:txBody>
       </p:sp>
       <p:sp>
         <p:nvSpPr>
-          <p:cNvPr id="38" name="关键洞察-rail">
+          <p:cNvPr id="38" name="key insights-rail">
             <a:extLst xmlns:a="http://schemas.openxmlformats.org/drawingml/2006/main">
               <a:ext uri="{FF2B5EF4-FFF2-40B4-BE49-F238E27FC236}">
                 <a16:creationId xmlns:a16="http://schemas.microsoft.com/office/drawing/2014/main" id="{D87B4E6C-E400-4417-94B9-A2BB28250F8F}"/>
@@ -2746,7 +2746,7 @@
       </p:sp>
       <p:sp>
         <p:nvSpPr>
-          <p:cNvPr id="39" name="关键洞察-title">
+          <p:cNvPr id="39" name="key insights-title">
             <a:extLst xmlns:a="http://schemas.openxmlformats.org/drawingml/2006/main">
               <a:ext uri="{FF2B5EF4-FFF2-40B4-BE49-F238E27FC236}">
                 <a16:creationId xmlns:a16="http://schemas.microsoft.com/office/drawing/2014/main" id="{91C5100A-DA77-4FF2-8863-A22435BA5915}"/>
@@ -2789,14 +2789,14 @@
                   <a:srgbClr val="15375F"/>
                 </a:solidFill>
               </a:rPr>
-              <a:t>关键洞察</a:t>
+              <a:t>key insights</a:t>
             </a:r>
           </a:p>
         </p:txBody>
       </p:sp>
       <p:sp>
         <p:nvSpPr>
-          <p:cNvPr id="40" name="关键洞察-item-1">
+          <p:cNvPr id="40" name="key insights-item-1">
             <a:extLst xmlns:a="http://schemas.openxmlformats.org/drawingml/2006/main">
               <a:ext uri="{FF2B5EF4-FFF2-40B4-BE49-F238E27FC236}">
                 <a16:creationId xmlns:a16="http://schemas.microsoft.com/office/drawing/2014/main" id="{62A6AAAF-941A-4025-83F3-25B870986E77}"/>
@@ -2845,14 +2845,14 @@
                   <a:srgbClr val="172033"/>
                 </a:solidFill>
               </a:rPr>
-              <a:t>业务 A 上升七个位次</a:t>
+              <a:t>business A Up seven places</a:t>
             </a:r>
           </a:p>
         </p:txBody>
       </p:sp>
       <p:sp>
         <p:nvSpPr>
-          <p:cNvPr id="41" name="关键洞察-item-2">
+          <p:cNvPr id="41" name="key insights-item-2">
             <a:extLst xmlns:a="http://schemas.openxmlformats.org/drawingml/2006/main">
               <a:ext uri="{FF2B5EF4-FFF2-40B4-BE49-F238E27FC236}">
                 <a16:creationId xmlns:a16="http://schemas.microsoft.com/office/drawing/2014/main" id="{EAC514A3-FDF9-4988-9810-327D01EBEA84}"/>
@@ -2901,14 +2901,14 @@
                   <a:srgbClr val="172033"/>
                 </a:solidFill>
               </a:rPr>
-              <a:t>前三名均完成产品标准化</a:t>
+              <a:t>The top three have all completed product standardization</a:t>
             </a:r>
           </a:p>
         </p:txBody>
       </p:sp>
       <p:sp>
         <p:nvSpPr>
-          <p:cNvPr id="42" name="关键洞察-item-3">
+          <p:cNvPr id="42" name="key insights-item-3">
             <a:extLst xmlns:a="http://schemas.openxmlformats.org/drawingml/2006/main">
               <a:ext uri="{FF2B5EF4-FFF2-40B4-BE49-F238E27FC236}">
                 <a16:creationId xmlns:a16="http://schemas.microsoft.com/office/drawing/2014/main" id="{2DA59F9D-196F-4BBD-9E99-413189074B92}"/>
@@ -2957,7 +2957,7 @@
                   <a:srgbClr val="172033"/>
                 </a:solidFill>
               </a:rPr>
-              <a:t>原头部业务排名普遍回落</a:t>
+              <a:t>The original top business rankings generally fell back</a:t>
             </a:r>
           </a:p>
         </p:txBody>
@@ -3013,7 +3013,7 @@
                   <a:srgbClr val="15375F"/>
                 </a:solidFill>
               </a:rPr>
-              <a:t>启示：复制产品标准化与渠道协同两项动作</a:t>
+              <a:t>Enlightenment: Copy the two actions of product standardization and channel collaboration</a:t>
             </a:r>
           </a:p>
         </p:txBody>
